--- a/presentation/slides.pptx
+++ b/presentation/slides.pptx
@@ -6189,7 +6189,7 @@
                 <a:ea typeface="Cambria" pitchFamily="34" charset="-122"/>
                 <a:cs typeface="Cambria" pitchFamily="34" charset="-120"/>
               </a:rPr>
-              <a:t>45</a:t>
+              <a:t>57</a:t>
             </a:r>
             <a:endParaRPr lang="en-US" sz="4000" dirty="0"/>
           </a:p>
